--- a/9TestUnit/2.Unittest.pptx
+++ b/9TestUnit/2.Unittest.pptx
@@ -8,6 +8,11 @@
     <p:sldId id="256" r:id="rId2"/>
     <p:sldId id="257" r:id="rId3"/>
     <p:sldId id="258" r:id="rId4"/>
+    <p:sldId id="259" r:id="rId5"/>
+    <p:sldId id="260" r:id="rId6"/>
+    <p:sldId id="261" r:id="rId7"/>
+    <p:sldId id="262" r:id="rId8"/>
+    <p:sldId id="263" r:id="rId9"/>
   </p:sldIdLst>
   <p:sldSz cx="12192000" cy="6858000"/>
   <p:notesSz cx="6858000" cy="9144000"/>
@@ -245,7 +250,7 @@
           <a:p>
             <a:fld id="{7F1801BD-F2C1-4FCB-889C-5FD334A03FB2}" type="datetimeFigureOut">
               <a:rPr lang="es-CO" smtClean="0"/>
-              <a:t>21/10/2025</a:t>
+              <a:t>28/10/2025</a:t>
             </a:fld>
             <a:endParaRPr lang="es-CO"/>
           </a:p>
@@ -415,7 +420,7 @@
           <a:p>
             <a:fld id="{7F1801BD-F2C1-4FCB-889C-5FD334A03FB2}" type="datetimeFigureOut">
               <a:rPr lang="es-CO" smtClean="0"/>
-              <a:t>21/10/2025</a:t>
+              <a:t>28/10/2025</a:t>
             </a:fld>
             <a:endParaRPr lang="es-CO"/>
           </a:p>
@@ -595,7 +600,7 @@
           <a:p>
             <a:fld id="{7F1801BD-F2C1-4FCB-889C-5FD334A03FB2}" type="datetimeFigureOut">
               <a:rPr lang="es-CO" smtClean="0"/>
-              <a:t>21/10/2025</a:t>
+              <a:t>28/10/2025</a:t>
             </a:fld>
             <a:endParaRPr lang="es-CO"/>
           </a:p>
@@ -765,7 +770,7 @@
           <a:p>
             <a:fld id="{7F1801BD-F2C1-4FCB-889C-5FD334A03FB2}" type="datetimeFigureOut">
               <a:rPr lang="es-CO" smtClean="0"/>
-              <a:t>21/10/2025</a:t>
+              <a:t>28/10/2025</a:t>
             </a:fld>
             <a:endParaRPr lang="es-CO"/>
           </a:p>
@@ -1011,7 +1016,7 @@
           <a:p>
             <a:fld id="{7F1801BD-F2C1-4FCB-889C-5FD334A03FB2}" type="datetimeFigureOut">
               <a:rPr lang="es-CO" smtClean="0"/>
-              <a:t>21/10/2025</a:t>
+              <a:t>28/10/2025</a:t>
             </a:fld>
             <a:endParaRPr lang="es-CO"/>
           </a:p>
@@ -1243,7 +1248,7 @@
           <a:p>
             <a:fld id="{7F1801BD-F2C1-4FCB-889C-5FD334A03FB2}" type="datetimeFigureOut">
               <a:rPr lang="es-CO" smtClean="0"/>
-              <a:t>21/10/2025</a:t>
+              <a:t>28/10/2025</a:t>
             </a:fld>
             <a:endParaRPr lang="es-CO"/>
           </a:p>
@@ -1610,7 +1615,7 @@
           <a:p>
             <a:fld id="{7F1801BD-F2C1-4FCB-889C-5FD334A03FB2}" type="datetimeFigureOut">
               <a:rPr lang="es-CO" smtClean="0"/>
-              <a:t>21/10/2025</a:t>
+              <a:t>28/10/2025</a:t>
             </a:fld>
             <a:endParaRPr lang="es-CO"/>
           </a:p>
@@ -1728,7 +1733,7 @@
           <a:p>
             <a:fld id="{7F1801BD-F2C1-4FCB-889C-5FD334A03FB2}" type="datetimeFigureOut">
               <a:rPr lang="es-CO" smtClean="0"/>
-              <a:t>21/10/2025</a:t>
+              <a:t>28/10/2025</a:t>
             </a:fld>
             <a:endParaRPr lang="es-CO"/>
           </a:p>
@@ -1823,7 +1828,7 @@
           <a:p>
             <a:fld id="{7F1801BD-F2C1-4FCB-889C-5FD334A03FB2}" type="datetimeFigureOut">
               <a:rPr lang="es-CO" smtClean="0"/>
-              <a:t>21/10/2025</a:t>
+              <a:t>28/10/2025</a:t>
             </a:fld>
             <a:endParaRPr lang="es-CO"/>
           </a:p>
@@ -2100,7 +2105,7 @@
           <a:p>
             <a:fld id="{7F1801BD-F2C1-4FCB-889C-5FD334A03FB2}" type="datetimeFigureOut">
               <a:rPr lang="es-CO" smtClean="0"/>
-              <a:t>21/10/2025</a:t>
+              <a:t>28/10/2025</a:t>
             </a:fld>
             <a:endParaRPr lang="es-CO"/>
           </a:p>
@@ -2357,7 +2362,7 @@
           <a:p>
             <a:fld id="{7F1801BD-F2C1-4FCB-889C-5FD334A03FB2}" type="datetimeFigureOut">
               <a:rPr lang="es-CO" smtClean="0"/>
-              <a:t>21/10/2025</a:t>
+              <a:t>28/10/2025</a:t>
             </a:fld>
             <a:endParaRPr lang="es-CO"/>
           </a:p>
@@ -2570,7 +2575,7 @@
           <a:p>
             <a:fld id="{7F1801BD-F2C1-4FCB-889C-5FD334A03FB2}" type="datetimeFigureOut">
               <a:rPr lang="es-CO" smtClean="0"/>
-              <a:t>21/10/2025</a:t>
+              <a:t>28/10/2025</a:t>
             </a:fld>
             <a:endParaRPr lang="es-CO"/>
           </a:p>
@@ -4070,6 +4075,1795 @@
 </p:sld>
 </file>
 
+<file path=ppt/slides/slide4.xml><?xml version="1.0" encoding="utf-8"?>
+<p:sld xmlns:a="http://schemas.openxmlformats.org/drawingml/2006/main" xmlns:r="http://schemas.openxmlformats.org/officeDocument/2006/relationships" xmlns:p="http://schemas.openxmlformats.org/presentationml/2006/main">
+  <p:cSld>
+    <p:spTree>
+      <p:nvGrpSpPr>
+        <p:cNvPr id="1" name=""/>
+        <p:cNvGrpSpPr/>
+        <p:nvPr/>
+      </p:nvGrpSpPr>
+      <p:grpSpPr>
+        <a:xfrm>
+          <a:off x="0" y="0"/>
+          <a:ext cx="0" cy="0"/>
+          <a:chOff x="0" y="0"/>
+          <a:chExt cx="0" cy="0"/>
+        </a:xfrm>
+      </p:grpSpPr>
+      <p:sp>
+        <p:nvSpPr>
+          <p:cNvPr id="2" name="Título 1">
+            <a:extLst>
+              <a:ext uri="{FF2B5EF4-FFF2-40B4-BE49-F238E27FC236}">
+                <a16:creationId xmlns:a16="http://schemas.microsoft.com/office/drawing/2014/main" id="{47536841-671E-441C-941A-C4EE9A906E3A}"/>
+              </a:ext>
+            </a:extLst>
+          </p:cNvPr>
+          <p:cNvSpPr>
+            <a:spLocks noGrp="1"/>
+          </p:cNvSpPr>
+          <p:nvPr>
+            <p:ph type="title"/>
+          </p:nvPr>
+        </p:nvSpPr>
+        <p:spPr/>
+        <p:txBody>
+          <a:bodyPr/>
+          <a:lstStyle/>
+          <a:p>
+            <a:r>
+              <a:rPr lang="es-ES" dirty="0"/>
+              <a:t>Ejemplo:</a:t>
+            </a:r>
+            <a:endParaRPr lang="es-CO" dirty="0"/>
+          </a:p>
+        </p:txBody>
+      </p:sp>
+      <p:pic>
+        <p:nvPicPr>
+          <p:cNvPr id="1026" name="Picture 2">
+            <a:extLst>
+              <a:ext uri="{FF2B5EF4-FFF2-40B4-BE49-F238E27FC236}">
+                <a16:creationId xmlns:a16="http://schemas.microsoft.com/office/drawing/2014/main" id="{DBBA7BFB-8B68-4A39-96A5-F57503CEF2D2}"/>
+              </a:ext>
+            </a:extLst>
+          </p:cNvPr>
+          <p:cNvPicPr>
+            <a:picLocks noChangeAspect="1" noChangeArrowheads="1"/>
+          </p:cNvPicPr>
+          <p:nvPr/>
+        </p:nvPicPr>
+        <p:blipFill>
+          <a:blip r:embed="rId2">
+            <a:extLst>
+              <a:ext uri="{28A0092B-C50C-407E-A947-70E740481C1C}">
+                <a14:useLocalDpi xmlns:a14="http://schemas.microsoft.com/office/drawing/2010/main" val="0"/>
+              </a:ext>
+            </a:extLst>
+          </a:blip>
+          <a:srcRect/>
+          <a:stretch>
+            <a:fillRect/>
+          </a:stretch>
+        </p:blipFill>
+        <p:spPr bwMode="auto">
+          <a:xfrm>
+            <a:off x="996755" y="1690688"/>
+            <a:ext cx="3924300" cy="4210050"/>
+          </a:xfrm>
+          <a:prstGeom prst="rect">
+            <a:avLst/>
+          </a:prstGeom>
+          <a:noFill/>
+          <a:extLst>
+            <a:ext uri="{909E8E84-426E-40DD-AFC4-6F175D3DCCD1}">
+              <a14:hiddenFill xmlns:a14="http://schemas.microsoft.com/office/drawing/2010/main">
+                <a:solidFill>
+                  <a:srgbClr val="FFFFFF"/>
+                </a:solidFill>
+              </a14:hiddenFill>
+            </a:ext>
+          </a:extLst>
+        </p:spPr>
+      </p:pic>
+      <p:sp>
+        <p:nvSpPr>
+          <p:cNvPr id="6" name="CuadroTexto 5">
+            <a:extLst>
+              <a:ext uri="{FF2B5EF4-FFF2-40B4-BE49-F238E27FC236}">
+                <a16:creationId xmlns:a16="http://schemas.microsoft.com/office/drawing/2014/main" id="{3BAEDFFC-6DF2-4114-BB0A-A96F5BB1ED8E}"/>
+              </a:ext>
+            </a:extLst>
+          </p:cNvPr>
+          <p:cNvSpPr txBox="1"/>
+          <p:nvPr/>
+        </p:nvSpPr>
+        <p:spPr>
+          <a:xfrm>
+            <a:off x="5665763" y="1690688"/>
+            <a:ext cx="6098344" cy="2368534"/>
+          </a:xfrm>
+          <a:prstGeom prst="rect">
+            <a:avLst/>
+          </a:prstGeom>
+          <a:noFill/>
+        </p:spPr>
+        <p:txBody>
+          <a:bodyPr wrap="square">
+            <a:spAutoFit/>
+          </a:bodyPr>
+          <a:lstStyle/>
+          <a:p>
+            <a:pPr>
+              <a:lnSpc>
+                <a:spcPct val="107000"/>
+              </a:lnSpc>
+              <a:spcAft>
+                <a:spcPts val="800"/>
+              </a:spcAft>
+            </a:pPr>
+            <a:r>
+              <a:rPr lang="es-CO" sz="1800" b="1" dirty="0">
+                <a:effectLst/>
+                <a:latin typeface="Arial" panose="020B0604020202020204" pitchFamily="34" charset="0"/>
+                <a:ea typeface="Times New Roman" panose="02020603050405020304" pitchFamily="18" charset="0"/>
+                <a:cs typeface="Times New Roman" panose="02020603050405020304" pitchFamily="18" charset="0"/>
+              </a:rPr>
+              <a:t>ESTRUCTURA DEL PROYECTO</a:t>
+            </a:r>
+            <a:endParaRPr lang="es-CO" sz="1600" dirty="0">
+              <a:effectLst/>
+              <a:latin typeface="Calibri" panose="020F0502020204030204" pitchFamily="34" charset="0"/>
+              <a:ea typeface="Calibri" panose="020F0502020204030204" pitchFamily="34" charset="0"/>
+              <a:cs typeface="Times New Roman" panose="02020603050405020304" pitchFamily="18" charset="0"/>
+            </a:endParaRPr>
+          </a:p>
+          <a:p>
+            <a:pPr>
+              <a:lnSpc>
+                <a:spcPct val="107000"/>
+              </a:lnSpc>
+              <a:spcAft>
+                <a:spcPts val="800"/>
+              </a:spcAft>
+            </a:pPr>
+            <a:r>
+              <a:rPr lang="es-CO" sz="1800" dirty="0" err="1">
+                <a:effectLst/>
+                <a:latin typeface="Arial" panose="020B0604020202020204" pitchFamily="34" charset="0"/>
+                <a:ea typeface="Times New Roman" panose="02020603050405020304" pitchFamily="18" charset="0"/>
+                <a:cs typeface="Times New Roman" panose="02020603050405020304" pitchFamily="18" charset="0"/>
+              </a:rPr>
+              <a:t>campo_magnetico</a:t>
+            </a:r>
+            <a:r>
+              <a:rPr lang="es-CO" sz="1800" dirty="0">
+                <a:effectLst/>
+                <a:latin typeface="Arial" panose="020B0604020202020204" pitchFamily="34" charset="0"/>
+                <a:ea typeface="Times New Roman" panose="02020603050405020304" pitchFamily="18" charset="0"/>
+                <a:cs typeface="Times New Roman" panose="02020603050405020304" pitchFamily="18" charset="0"/>
+              </a:rPr>
+              <a:t>/</a:t>
+            </a:r>
+            <a:endParaRPr lang="es-CO" sz="1600" dirty="0">
+              <a:effectLst/>
+              <a:latin typeface="Calibri" panose="020F0502020204030204" pitchFamily="34" charset="0"/>
+              <a:ea typeface="Calibri" panose="020F0502020204030204" pitchFamily="34" charset="0"/>
+              <a:cs typeface="Times New Roman" panose="02020603050405020304" pitchFamily="18" charset="0"/>
+            </a:endParaRPr>
+          </a:p>
+          <a:p>
+            <a:pPr>
+              <a:lnSpc>
+                <a:spcPct val="107000"/>
+              </a:lnSpc>
+              <a:spcAft>
+                <a:spcPts val="800"/>
+              </a:spcAft>
+            </a:pPr>
+            <a:r>
+              <a:rPr lang="es-CO" sz="1800" dirty="0">
+                <a:effectLst/>
+                <a:latin typeface="Arial" panose="020B0604020202020204" pitchFamily="34" charset="0"/>
+                <a:ea typeface="Times New Roman" panose="02020603050405020304" pitchFamily="18" charset="0"/>
+                <a:cs typeface="Times New Roman" panose="02020603050405020304" pitchFamily="18" charset="0"/>
+              </a:rPr>
+              <a:t>│</a:t>
+            </a:r>
+            <a:endParaRPr lang="es-CO" sz="1600" dirty="0">
+              <a:effectLst/>
+              <a:latin typeface="Calibri" panose="020F0502020204030204" pitchFamily="34" charset="0"/>
+              <a:ea typeface="Calibri" panose="020F0502020204030204" pitchFamily="34" charset="0"/>
+              <a:cs typeface="Times New Roman" panose="02020603050405020304" pitchFamily="18" charset="0"/>
+            </a:endParaRPr>
+          </a:p>
+          <a:p>
+            <a:pPr>
+              <a:lnSpc>
+                <a:spcPct val="107000"/>
+              </a:lnSpc>
+              <a:spcAft>
+                <a:spcPts val="800"/>
+              </a:spcAft>
+            </a:pPr>
+            <a:r>
+              <a:rPr lang="es-CO" sz="1800" dirty="0">
+                <a:effectLst/>
+                <a:latin typeface="Arial" panose="020B0604020202020204" pitchFamily="34" charset="0"/>
+                <a:ea typeface="Times New Roman" panose="02020603050405020304" pitchFamily="18" charset="0"/>
+                <a:cs typeface="Times New Roman" panose="02020603050405020304" pitchFamily="18" charset="0"/>
+              </a:rPr>
+              <a:t>├── particula.py           # modelo físico</a:t>
+            </a:r>
+            <a:endParaRPr lang="es-CO" sz="1600" dirty="0">
+              <a:effectLst/>
+              <a:latin typeface="Calibri" panose="020F0502020204030204" pitchFamily="34" charset="0"/>
+              <a:ea typeface="Calibri" panose="020F0502020204030204" pitchFamily="34" charset="0"/>
+              <a:cs typeface="Times New Roman" panose="02020603050405020304" pitchFamily="18" charset="0"/>
+            </a:endParaRPr>
+          </a:p>
+          <a:p>
+            <a:pPr>
+              <a:lnSpc>
+                <a:spcPct val="107000"/>
+              </a:lnSpc>
+              <a:spcAft>
+                <a:spcPts val="800"/>
+              </a:spcAft>
+            </a:pPr>
+            <a:r>
+              <a:rPr lang="es-CO" sz="1800" dirty="0">
+                <a:effectLst/>
+                <a:latin typeface="Arial" panose="020B0604020202020204" pitchFamily="34" charset="0"/>
+                <a:ea typeface="Times New Roman" panose="02020603050405020304" pitchFamily="18" charset="0"/>
+                <a:cs typeface="Times New Roman" panose="02020603050405020304" pitchFamily="18" charset="0"/>
+              </a:rPr>
+              <a:t>├── simulacion.py          # simulación numérica</a:t>
+            </a:r>
+            <a:endParaRPr lang="es-CO" sz="1600" dirty="0">
+              <a:effectLst/>
+              <a:latin typeface="Calibri" panose="020F0502020204030204" pitchFamily="34" charset="0"/>
+              <a:ea typeface="Calibri" panose="020F0502020204030204" pitchFamily="34" charset="0"/>
+              <a:cs typeface="Times New Roman" panose="02020603050405020304" pitchFamily="18" charset="0"/>
+            </a:endParaRPr>
+          </a:p>
+          <a:p>
+            <a:pPr>
+              <a:lnSpc>
+                <a:spcPct val="107000"/>
+              </a:lnSpc>
+              <a:spcAft>
+                <a:spcPts val="800"/>
+              </a:spcAft>
+            </a:pPr>
+            <a:r>
+              <a:rPr lang="es-CO" sz="1800" dirty="0">
+                <a:effectLst/>
+                <a:latin typeface="Arial" panose="020B0604020202020204" pitchFamily="34" charset="0"/>
+                <a:ea typeface="Times New Roman" panose="02020603050405020304" pitchFamily="18" charset="0"/>
+                <a:cs typeface="Times New Roman" panose="02020603050405020304" pitchFamily="18" charset="0"/>
+              </a:rPr>
+              <a:t>└── test_particula.py      # pruebas unitarias con </a:t>
+            </a:r>
+            <a:r>
+              <a:rPr lang="es-CO" sz="1800" dirty="0" err="1">
+                <a:effectLst/>
+                <a:latin typeface="Arial" panose="020B0604020202020204" pitchFamily="34" charset="0"/>
+                <a:ea typeface="Times New Roman" panose="02020603050405020304" pitchFamily="18" charset="0"/>
+                <a:cs typeface="Times New Roman" panose="02020603050405020304" pitchFamily="18" charset="0"/>
+              </a:rPr>
+              <a:t>unittest</a:t>
+            </a:r>
+            <a:endParaRPr lang="es-CO" sz="1600" dirty="0">
+              <a:effectLst/>
+              <a:latin typeface="Calibri" panose="020F0502020204030204" pitchFamily="34" charset="0"/>
+              <a:ea typeface="Calibri" panose="020F0502020204030204" pitchFamily="34" charset="0"/>
+              <a:cs typeface="Times New Roman" panose="02020603050405020304" pitchFamily="18" charset="0"/>
+            </a:endParaRPr>
+          </a:p>
+        </p:txBody>
+      </p:sp>
+    </p:spTree>
+    <p:extLst>
+      <p:ext uri="{BB962C8B-B14F-4D97-AF65-F5344CB8AC3E}">
+        <p14:creationId xmlns:p14="http://schemas.microsoft.com/office/powerpoint/2010/main" val="4101291113"/>
+      </p:ext>
+    </p:extLst>
+  </p:cSld>
+  <p:clrMapOvr>
+    <a:masterClrMapping/>
+  </p:clrMapOvr>
+</p:sld>
+</file>
+
+<file path=ppt/slides/slide5.xml><?xml version="1.0" encoding="utf-8"?>
+<p:sld xmlns:a="http://schemas.openxmlformats.org/drawingml/2006/main" xmlns:r="http://schemas.openxmlformats.org/officeDocument/2006/relationships" xmlns:p="http://schemas.openxmlformats.org/presentationml/2006/main">
+  <p:cSld>
+    <p:spTree>
+      <p:nvGrpSpPr>
+        <p:cNvPr id="1" name=""/>
+        <p:cNvGrpSpPr/>
+        <p:nvPr/>
+      </p:nvGrpSpPr>
+      <p:grpSpPr>
+        <a:xfrm>
+          <a:off x="0" y="0"/>
+          <a:ext cx="0" cy="0"/>
+          <a:chOff x="0" y="0"/>
+          <a:chExt cx="0" cy="0"/>
+        </a:xfrm>
+      </p:grpSpPr>
+      <p:sp>
+        <p:nvSpPr>
+          <p:cNvPr id="4" name="Rectangle 1">
+            <a:extLst>
+              <a:ext uri="{FF2B5EF4-FFF2-40B4-BE49-F238E27FC236}">
+                <a16:creationId xmlns:a16="http://schemas.microsoft.com/office/drawing/2014/main" id="{5DEAD1C7-F47E-4919-80E4-95B6C82BCA91}"/>
+              </a:ext>
+            </a:extLst>
+          </p:cNvPr>
+          <p:cNvSpPr>
+            <a:spLocks noChangeArrowheads="1"/>
+          </p:cNvSpPr>
+          <p:nvPr/>
+        </p:nvSpPr>
+        <p:spPr bwMode="auto">
+          <a:xfrm>
+            <a:off x="492369" y="427586"/>
+            <a:ext cx="11169747" cy="2246769"/>
+          </a:xfrm>
+          <a:prstGeom prst="rect">
+            <a:avLst/>
+          </a:prstGeom>
+          <a:noFill/>
+          <a:ln>
+            <a:noFill/>
+          </a:ln>
+          <a:effectLst/>
+          <a:extLst>
+            <a:ext uri="{909E8E84-426E-40DD-AFC4-6F175D3DCCD1}">
+              <a14:hiddenFill xmlns:a14="http://schemas.microsoft.com/office/drawing/2010/main">
+                <a:solidFill>
+                  <a:schemeClr val="accent1"/>
+                </a:solidFill>
+              </a14:hiddenFill>
+            </a:ext>
+            <a:ext uri="{91240B29-F687-4F45-9708-019B960494DF}">
+              <a14:hiddenLine xmlns:a14="http://schemas.microsoft.com/office/drawing/2010/main" w="9525">
+                <a:solidFill>
+                  <a:schemeClr val="tx1"/>
+                </a:solidFill>
+                <a:miter lim="800000"/>
+                <a:headEnd/>
+                <a:tailEnd/>
+              </a14:hiddenLine>
+            </a:ext>
+            <a:ext uri="{AF507438-7753-43E0-B8FC-AC1667EBCBE1}">
+              <a14:hiddenEffects xmlns:a14="http://schemas.microsoft.com/office/drawing/2010/main">
+                <a:effectLst>
+                  <a:outerShdw dist="35921" dir="2700000" algn="ctr" rotWithShape="0">
+                    <a:schemeClr val="bg2"/>
+                  </a:outerShdw>
+                </a:effectLst>
+              </a14:hiddenEffects>
+            </a:ext>
+          </a:extLst>
+        </p:spPr>
+        <p:txBody>
+          <a:bodyPr vert="horz" wrap="square" lIns="91440" tIns="45720" rIns="91440" bIns="45720" numCol="1" anchor="ctr" anchorCtr="0" compatLnSpc="1">
+            <a:prstTxWarp prst="textNoShape">
+              <a:avLst/>
+            </a:prstTxWarp>
+            <a:spAutoFit/>
+          </a:bodyPr>
+          <a:lstStyle/>
+          <a:p>
+            <a:pPr marL="0" marR="0" lvl="0" indent="0" algn="l" defTabSz="914400" rtl="0" eaLnBrk="0" fontAlgn="base" latinLnBrk="0" hangingPunct="0">
+              <a:lnSpc>
+                <a:spcPct val="100000"/>
+              </a:lnSpc>
+              <a:spcBef>
+                <a:spcPct val="0"/>
+              </a:spcBef>
+              <a:spcAft>
+                <a:spcPct val="0"/>
+              </a:spcAft>
+              <a:buClrTx/>
+              <a:buSzTx/>
+              <a:buFontTx/>
+              <a:buNone/>
+              <a:tabLst/>
+            </a:pPr>
+            <a:r>
+              <a:rPr kumimoji="0" lang="es-CO" altLang="es-CO" sz="2000" b="1" i="0" u="none" strike="noStrike" cap="none" normalizeH="0" baseline="0" dirty="0">
+                <a:ln>
+                  <a:noFill/>
+                </a:ln>
+                <a:solidFill>
+                  <a:schemeClr val="tx1"/>
+                </a:solidFill>
+                <a:effectLst/>
+                <a:latin typeface="Arial" panose="020B0604020202020204" pitchFamily="34" charset="0"/>
+                <a:cs typeface="Arial" panose="020B0604020202020204" pitchFamily="34" charset="0"/>
+              </a:rPr>
+              <a:t>1. Archivo particula.py</a:t>
+            </a:r>
+          </a:p>
+          <a:p>
+            <a:pPr marL="0" marR="0" lvl="0" indent="0" algn="l" defTabSz="914400" rtl="0" eaLnBrk="0" fontAlgn="base" latinLnBrk="0" hangingPunct="0">
+              <a:lnSpc>
+                <a:spcPct val="100000"/>
+              </a:lnSpc>
+              <a:spcBef>
+                <a:spcPct val="0"/>
+              </a:spcBef>
+              <a:spcAft>
+                <a:spcPct val="0"/>
+              </a:spcAft>
+              <a:buClrTx/>
+              <a:buSzTx/>
+              <a:buFontTx/>
+              <a:buNone/>
+              <a:tabLst/>
+            </a:pPr>
+            <a:endParaRPr kumimoji="0" lang="es-CO" altLang="es-CO" sz="2000" b="1" i="0" u="none" strike="noStrike" cap="none" normalizeH="0" baseline="0" dirty="0">
+              <a:ln>
+                <a:noFill/>
+              </a:ln>
+              <a:solidFill>
+                <a:schemeClr val="tx1"/>
+              </a:solidFill>
+              <a:effectLst/>
+              <a:latin typeface="Arial" panose="020B0604020202020204" pitchFamily="34" charset="0"/>
+              <a:cs typeface="Arial" panose="020B0604020202020204" pitchFamily="34" charset="0"/>
+            </a:endParaRPr>
+          </a:p>
+          <a:p>
+            <a:pPr marL="0" marR="0" lvl="0" indent="0" algn="l" defTabSz="914400" rtl="0" eaLnBrk="0" fontAlgn="base" latinLnBrk="0" hangingPunct="0">
+              <a:lnSpc>
+                <a:spcPct val="100000"/>
+              </a:lnSpc>
+              <a:spcBef>
+                <a:spcPct val="0"/>
+              </a:spcBef>
+              <a:spcAft>
+                <a:spcPct val="0"/>
+              </a:spcAft>
+              <a:buClrTx/>
+              <a:buSzTx/>
+              <a:buFontTx/>
+              <a:buNone/>
+              <a:tabLst/>
+            </a:pPr>
+            <a:r>
+              <a:rPr kumimoji="0" lang="es-CO" altLang="es-CO" sz="2000" i="0" u="none" strike="noStrike" cap="none" normalizeH="0" baseline="0" dirty="0">
+                <a:ln>
+                  <a:noFill/>
+                </a:ln>
+                <a:solidFill>
+                  <a:schemeClr val="tx1"/>
+                </a:solidFill>
+                <a:effectLst/>
+                <a:latin typeface="Arial" panose="020B0604020202020204" pitchFamily="34" charset="0"/>
+                <a:cs typeface="Arial" panose="020B0604020202020204" pitchFamily="34" charset="0"/>
+              </a:rPr>
+              <a:t>Propósito: Define la clase </a:t>
+            </a:r>
+            <a:r>
+              <a:rPr kumimoji="0" lang="es-CO" altLang="es-CO" sz="2000" i="0" u="none" strike="noStrike" cap="none" normalizeH="0" baseline="0" dirty="0" err="1">
+                <a:ln>
+                  <a:noFill/>
+                </a:ln>
+                <a:solidFill>
+                  <a:schemeClr val="tx1"/>
+                </a:solidFill>
+                <a:effectLst/>
+                <a:latin typeface="Arial" panose="020B0604020202020204" pitchFamily="34" charset="0"/>
+                <a:cs typeface="Arial" panose="020B0604020202020204" pitchFamily="34" charset="0"/>
+              </a:rPr>
+              <a:t>Particula</a:t>
+            </a:r>
+            <a:r>
+              <a:rPr kumimoji="0" lang="es-CO" altLang="es-CO" sz="2000" i="0" u="none" strike="noStrike" cap="none" normalizeH="0" baseline="0" dirty="0">
+                <a:ln>
+                  <a:noFill/>
+                </a:ln>
+                <a:solidFill>
+                  <a:schemeClr val="tx1"/>
+                </a:solidFill>
+                <a:effectLst/>
+                <a:latin typeface="Arial" panose="020B0604020202020204" pitchFamily="34" charset="0"/>
+                <a:cs typeface="Arial" panose="020B0604020202020204" pitchFamily="34" charset="0"/>
+              </a:rPr>
+              <a:t>, que representa un modelo físico básico: masa, carga, velocidad y campo magnético.</a:t>
+            </a:r>
+            <a:br>
+              <a:rPr kumimoji="0" lang="es-CO" altLang="es-CO" sz="2000" i="0" u="none" strike="noStrike" cap="none" normalizeH="0" baseline="0" dirty="0">
+                <a:ln>
+                  <a:noFill/>
+                </a:ln>
+                <a:solidFill>
+                  <a:schemeClr val="tx1"/>
+                </a:solidFill>
+                <a:effectLst/>
+                <a:latin typeface="Arial" panose="020B0604020202020204" pitchFamily="34" charset="0"/>
+                <a:cs typeface="Arial" panose="020B0604020202020204" pitchFamily="34" charset="0"/>
+              </a:rPr>
+            </a:br>
+            <a:endParaRPr kumimoji="0" lang="es-CO" altLang="es-CO" sz="2000" i="0" u="none" strike="noStrike" cap="none" normalizeH="0" baseline="0" dirty="0">
+              <a:ln>
+                <a:noFill/>
+              </a:ln>
+              <a:solidFill>
+                <a:schemeClr val="tx1"/>
+              </a:solidFill>
+              <a:effectLst/>
+              <a:latin typeface="Arial" panose="020B0604020202020204" pitchFamily="34" charset="0"/>
+              <a:cs typeface="Arial" panose="020B0604020202020204" pitchFamily="34" charset="0"/>
+            </a:endParaRPr>
+          </a:p>
+          <a:p>
+            <a:pPr marL="0" marR="0" lvl="0" indent="0" algn="l" defTabSz="914400" rtl="0" eaLnBrk="0" fontAlgn="base" latinLnBrk="0" hangingPunct="0">
+              <a:lnSpc>
+                <a:spcPct val="100000"/>
+              </a:lnSpc>
+              <a:spcBef>
+                <a:spcPct val="0"/>
+              </a:spcBef>
+              <a:spcAft>
+                <a:spcPct val="0"/>
+              </a:spcAft>
+              <a:buClrTx/>
+              <a:buSzTx/>
+              <a:buFontTx/>
+              <a:buNone/>
+              <a:tabLst/>
+            </a:pPr>
+            <a:r>
+              <a:rPr kumimoji="0" lang="es-CO" altLang="es-CO" sz="2000" i="0" u="none" strike="noStrike" cap="none" normalizeH="0" baseline="0" dirty="0">
+                <a:ln>
+                  <a:noFill/>
+                </a:ln>
+                <a:solidFill>
+                  <a:schemeClr val="tx1"/>
+                </a:solidFill>
+                <a:effectLst/>
+                <a:latin typeface="Arial" panose="020B0604020202020204" pitchFamily="34" charset="0"/>
+                <a:cs typeface="Arial" panose="020B0604020202020204" pitchFamily="34" charset="0"/>
+              </a:rPr>
+              <a:t>Contiene los métodos que describen propiedades analíticas del movimiento (no simula, solo calcula).</a:t>
+            </a:r>
+          </a:p>
+        </p:txBody>
+      </p:sp>
+      <p:sp>
+        <p:nvSpPr>
+          <p:cNvPr id="6" name="CuadroTexto 5">
+            <a:extLst>
+              <a:ext uri="{FF2B5EF4-FFF2-40B4-BE49-F238E27FC236}">
+                <a16:creationId xmlns:a16="http://schemas.microsoft.com/office/drawing/2014/main" id="{F56CD764-6C3F-4486-85F0-D13A33CE6AB1}"/>
+              </a:ext>
+            </a:extLst>
+          </p:cNvPr>
+          <p:cNvSpPr txBox="1"/>
+          <p:nvPr/>
+        </p:nvSpPr>
+        <p:spPr>
+          <a:xfrm>
+            <a:off x="961877" y="3048929"/>
+            <a:ext cx="6015699" cy="3108543"/>
+          </a:xfrm>
+          <a:prstGeom prst="rect">
+            <a:avLst/>
+          </a:prstGeom>
+          <a:noFill/>
+        </p:spPr>
+        <p:txBody>
+          <a:bodyPr wrap="square">
+            <a:spAutoFit/>
+          </a:bodyPr>
+          <a:lstStyle/>
+          <a:p>
+            <a:r>
+              <a:rPr lang="es-CO" sz="2800" dirty="0" err="1">
+                <a:solidFill>
+                  <a:srgbClr val="00B050"/>
+                </a:solidFill>
+              </a:rPr>
+              <a:t>class</a:t>
+            </a:r>
+            <a:r>
+              <a:rPr lang="es-CO" sz="2800" dirty="0">
+                <a:solidFill>
+                  <a:srgbClr val="00B050"/>
+                </a:solidFill>
+              </a:rPr>
+              <a:t> </a:t>
+            </a:r>
+            <a:r>
+              <a:rPr lang="es-CO" sz="2800" dirty="0" err="1">
+                <a:solidFill>
+                  <a:srgbClr val="00B050"/>
+                </a:solidFill>
+              </a:rPr>
+              <a:t>Particula</a:t>
+            </a:r>
+            <a:r>
+              <a:rPr lang="es-CO" sz="2800" dirty="0">
+                <a:solidFill>
+                  <a:srgbClr val="00B050"/>
+                </a:solidFill>
+              </a:rPr>
+              <a:t>:</a:t>
+            </a:r>
+          </a:p>
+          <a:p>
+            <a:r>
+              <a:rPr lang="es-CO" sz="2800" dirty="0">
+                <a:solidFill>
+                  <a:srgbClr val="00B050"/>
+                </a:solidFill>
+              </a:rPr>
+              <a:t>    """Clase que representa una partícula cargada en un campo magnético uniforme.""“</a:t>
+            </a:r>
+          </a:p>
+          <a:p>
+            <a:endParaRPr lang="es-CO" sz="2800" dirty="0">
+              <a:solidFill>
+                <a:srgbClr val="00B050"/>
+              </a:solidFill>
+            </a:endParaRPr>
+          </a:p>
+          <a:p>
+            <a:endParaRPr lang="es-CO" sz="2800" dirty="0">
+              <a:solidFill>
+                <a:srgbClr val="00B050"/>
+              </a:solidFill>
+            </a:endParaRPr>
+          </a:p>
+          <a:p>
+            <a:r>
+              <a:rPr lang="en-US" sz="2800" dirty="0">
+                <a:solidFill>
+                  <a:srgbClr val="00B050"/>
+                </a:solidFill>
+              </a:rPr>
+              <a:t>def __</a:t>
+            </a:r>
+            <a:r>
+              <a:rPr lang="en-US" sz="2800" dirty="0" err="1">
+                <a:solidFill>
+                  <a:srgbClr val="00B050"/>
+                </a:solidFill>
+              </a:rPr>
+              <a:t>init</a:t>
+            </a:r>
+            <a:r>
+              <a:rPr lang="en-US" sz="2800" dirty="0">
+                <a:solidFill>
+                  <a:srgbClr val="00B050"/>
+                </a:solidFill>
+              </a:rPr>
+              <a:t>__(self, q, m, v0, B):</a:t>
+            </a:r>
+          </a:p>
+        </p:txBody>
+      </p:sp>
+      <p:sp>
+        <p:nvSpPr>
+          <p:cNvPr id="7" name="Rectangle 2">
+            <a:extLst>
+              <a:ext uri="{FF2B5EF4-FFF2-40B4-BE49-F238E27FC236}">
+                <a16:creationId xmlns:a16="http://schemas.microsoft.com/office/drawing/2014/main" id="{2EAB00AD-2D03-490A-9A58-22A565579EB6}"/>
+              </a:ext>
+            </a:extLst>
+          </p:cNvPr>
+          <p:cNvSpPr>
+            <a:spLocks noChangeArrowheads="1"/>
+          </p:cNvSpPr>
+          <p:nvPr/>
+        </p:nvSpPr>
+        <p:spPr bwMode="auto">
+          <a:xfrm>
+            <a:off x="7765366" y="3325928"/>
+            <a:ext cx="3896750" cy="2831544"/>
+          </a:xfrm>
+          <a:prstGeom prst="rect">
+            <a:avLst/>
+          </a:prstGeom>
+          <a:noFill/>
+          <a:ln>
+            <a:noFill/>
+          </a:ln>
+          <a:effectLst/>
+          <a:extLst>
+            <a:ext uri="{909E8E84-426E-40DD-AFC4-6F175D3DCCD1}">
+              <a14:hiddenFill xmlns:a14="http://schemas.microsoft.com/office/drawing/2010/main">
+                <a:solidFill>
+                  <a:schemeClr val="accent1"/>
+                </a:solidFill>
+              </a14:hiddenFill>
+            </a:ext>
+            <a:ext uri="{91240B29-F687-4F45-9708-019B960494DF}">
+              <a14:hiddenLine xmlns:a14="http://schemas.microsoft.com/office/drawing/2010/main" w="9525">
+                <a:solidFill>
+                  <a:schemeClr val="tx1"/>
+                </a:solidFill>
+                <a:miter lim="800000"/>
+                <a:headEnd/>
+                <a:tailEnd/>
+              </a14:hiddenLine>
+            </a:ext>
+            <a:ext uri="{AF507438-7753-43E0-B8FC-AC1667EBCBE1}">
+              <a14:hiddenEffects xmlns:a14="http://schemas.microsoft.com/office/drawing/2010/main">
+                <a:effectLst>
+                  <a:outerShdw dist="35921" dir="2700000" algn="ctr" rotWithShape="0">
+                    <a:schemeClr val="bg2"/>
+                  </a:outerShdw>
+                </a:effectLst>
+              </a14:hiddenEffects>
+            </a:ext>
+          </a:extLst>
+        </p:spPr>
+        <p:txBody>
+          <a:bodyPr vert="horz" wrap="square" lIns="91440" tIns="45720" rIns="91440" bIns="45720" numCol="1" anchor="ctr" anchorCtr="0" compatLnSpc="1">
+            <a:prstTxWarp prst="textNoShape">
+              <a:avLst/>
+            </a:prstTxWarp>
+            <a:spAutoFit/>
+          </a:bodyPr>
+          <a:lstStyle/>
+          <a:p>
+            <a:pPr marL="0" marR="0" lvl="0" indent="0" algn="l" defTabSz="914400" rtl="0" eaLnBrk="0" fontAlgn="base" latinLnBrk="0" hangingPunct="0">
+              <a:lnSpc>
+                <a:spcPct val="100000"/>
+              </a:lnSpc>
+              <a:spcBef>
+                <a:spcPct val="0"/>
+              </a:spcBef>
+              <a:spcAft>
+                <a:spcPct val="0"/>
+              </a:spcAft>
+              <a:buClrTx/>
+              <a:buSzTx/>
+              <a:buFontTx/>
+              <a:buNone/>
+              <a:tabLst/>
+            </a:pPr>
+            <a:r>
+              <a:rPr kumimoji="0" lang="es-CO" altLang="es-CO" sz="2000" b="0" i="0" u="none" strike="noStrike" cap="none" normalizeH="0" baseline="0" dirty="0">
+                <a:ln>
+                  <a:noFill/>
+                </a:ln>
+                <a:solidFill>
+                  <a:schemeClr val="tx1"/>
+                </a:solidFill>
+                <a:effectLst/>
+                <a:latin typeface="Arial" panose="020B0604020202020204" pitchFamily="34" charset="0"/>
+                <a:cs typeface="Arial" panose="020B0604020202020204" pitchFamily="34" charset="0"/>
+              </a:rPr>
+              <a:t>El constructor recibe:</a:t>
+            </a:r>
+          </a:p>
+          <a:p>
+            <a:pPr marL="0" marR="0" lvl="0" indent="0" algn="l" defTabSz="914400" rtl="0" eaLnBrk="0" fontAlgn="base" latinLnBrk="0" hangingPunct="0">
+              <a:lnSpc>
+                <a:spcPct val="100000"/>
+              </a:lnSpc>
+              <a:spcBef>
+                <a:spcPct val="0"/>
+              </a:spcBef>
+              <a:spcAft>
+                <a:spcPct val="0"/>
+              </a:spcAft>
+              <a:buClrTx/>
+              <a:buSzTx/>
+              <a:buFontTx/>
+              <a:buChar char="•"/>
+              <a:tabLst/>
+            </a:pPr>
+            <a:r>
+              <a:rPr kumimoji="0" lang="es-CO" altLang="es-CO" sz="2000" b="0" i="0" u="none" strike="noStrike" cap="none" normalizeH="0" baseline="0" dirty="0">
+                <a:ln>
+                  <a:noFill/>
+                </a:ln>
+                <a:solidFill>
+                  <a:schemeClr val="tx1"/>
+                </a:solidFill>
+                <a:effectLst/>
+                <a:latin typeface="Arial" panose="020B0604020202020204" pitchFamily="34" charset="0"/>
+                <a:cs typeface="Arial" panose="020B0604020202020204" pitchFamily="34" charset="0"/>
+              </a:rPr>
+              <a:t>q: carga eléctrica (en </a:t>
+            </a:r>
+            <a:r>
+              <a:rPr kumimoji="0" lang="es-CO" altLang="es-CO" sz="2000" b="0" i="0" u="none" strike="noStrike" cap="none" normalizeH="0" baseline="0" dirty="0" err="1">
+                <a:ln>
+                  <a:noFill/>
+                </a:ln>
+                <a:solidFill>
+                  <a:schemeClr val="tx1"/>
+                </a:solidFill>
+                <a:effectLst/>
+                <a:latin typeface="Arial" panose="020B0604020202020204" pitchFamily="34" charset="0"/>
+                <a:cs typeface="Arial" panose="020B0604020202020204" pitchFamily="34" charset="0"/>
+              </a:rPr>
+              <a:t>coulombios</a:t>
+            </a:r>
+            <a:r>
+              <a:rPr kumimoji="0" lang="es-CO" altLang="es-CO" sz="2000" b="0" i="0" u="none" strike="noStrike" cap="none" normalizeH="0" baseline="0" dirty="0">
+                <a:ln>
+                  <a:noFill/>
+                </a:ln>
+                <a:solidFill>
+                  <a:schemeClr val="tx1"/>
+                </a:solidFill>
+                <a:effectLst/>
+                <a:latin typeface="Arial" panose="020B0604020202020204" pitchFamily="34" charset="0"/>
+                <a:cs typeface="Arial" panose="020B0604020202020204" pitchFamily="34" charset="0"/>
+              </a:rPr>
+              <a:t>)</a:t>
+            </a:r>
+          </a:p>
+          <a:p>
+            <a:pPr marL="0" marR="0" lvl="0" indent="0" algn="l" defTabSz="914400" rtl="0" eaLnBrk="0" fontAlgn="base" latinLnBrk="0" hangingPunct="0">
+              <a:lnSpc>
+                <a:spcPct val="100000"/>
+              </a:lnSpc>
+              <a:spcBef>
+                <a:spcPct val="0"/>
+              </a:spcBef>
+              <a:spcAft>
+                <a:spcPct val="0"/>
+              </a:spcAft>
+              <a:buClrTx/>
+              <a:buSzTx/>
+              <a:buFontTx/>
+              <a:buChar char="•"/>
+              <a:tabLst/>
+            </a:pPr>
+            <a:r>
+              <a:rPr kumimoji="0" lang="es-CO" altLang="es-CO" sz="2000" b="0" i="0" u="none" strike="noStrike" cap="none" normalizeH="0" baseline="0" dirty="0">
+                <a:ln>
+                  <a:noFill/>
+                </a:ln>
+                <a:solidFill>
+                  <a:schemeClr val="tx1"/>
+                </a:solidFill>
+                <a:effectLst/>
+                <a:latin typeface="Arial" panose="020B0604020202020204" pitchFamily="34" charset="0"/>
+                <a:cs typeface="Arial" panose="020B0604020202020204" pitchFamily="34" charset="0"/>
+              </a:rPr>
+              <a:t>m: masa (en kilogramos)</a:t>
+            </a:r>
+          </a:p>
+          <a:p>
+            <a:pPr marL="0" marR="0" lvl="0" indent="0" algn="l" defTabSz="914400" rtl="0" eaLnBrk="0" fontAlgn="base" latinLnBrk="0" hangingPunct="0">
+              <a:lnSpc>
+                <a:spcPct val="100000"/>
+              </a:lnSpc>
+              <a:spcBef>
+                <a:spcPct val="0"/>
+              </a:spcBef>
+              <a:spcAft>
+                <a:spcPct val="0"/>
+              </a:spcAft>
+              <a:buClrTx/>
+              <a:buSzTx/>
+              <a:buFontTx/>
+              <a:buChar char="•"/>
+              <a:tabLst/>
+            </a:pPr>
+            <a:r>
+              <a:rPr kumimoji="0" lang="es-CO" altLang="es-CO" sz="2000" b="0" i="0" u="none" strike="noStrike" cap="none" normalizeH="0" baseline="0" dirty="0">
+                <a:ln>
+                  <a:noFill/>
+                </a:ln>
+                <a:solidFill>
+                  <a:schemeClr val="tx1"/>
+                </a:solidFill>
+                <a:effectLst/>
+                <a:latin typeface="Arial" panose="020B0604020202020204" pitchFamily="34" charset="0"/>
+                <a:cs typeface="Arial" panose="020B0604020202020204" pitchFamily="34" charset="0"/>
+              </a:rPr>
+              <a:t>v0: vector velocidad inicial (</a:t>
+            </a:r>
+            <a:r>
+              <a:rPr kumimoji="0" lang="es-CO" altLang="es-CO" sz="2000" b="0" i="0" u="none" strike="noStrike" cap="none" normalizeH="0" baseline="0" dirty="0" err="1">
+                <a:ln>
+                  <a:noFill/>
+                </a:ln>
+                <a:solidFill>
+                  <a:schemeClr val="tx1"/>
+                </a:solidFill>
+                <a:effectLst/>
+                <a:latin typeface="Arial" panose="020B0604020202020204" pitchFamily="34" charset="0"/>
+                <a:cs typeface="Arial" panose="020B0604020202020204" pitchFamily="34" charset="0"/>
+              </a:rPr>
+              <a:t>vx</a:t>
+            </a:r>
+            <a:r>
+              <a:rPr kumimoji="0" lang="es-CO" altLang="es-CO" sz="2000" b="0" i="0" u="none" strike="noStrike" cap="none" normalizeH="0" baseline="0" dirty="0">
+                <a:ln>
+                  <a:noFill/>
+                </a:ln>
+                <a:solidFill>
+                  <a:schemeClr val="tx1"/>
+                </a:solidFill>
+                <a:effectLst/>
+                <a:latin typeface="Arial" panose="020B0604020202020204" pitchFamily="34" charset="0"/>
+                <a:cs typeface="Arial" panose="020B0604020202020204" pitchFamily="34" charset="0"/>
+              </a:rPr>
+              <a:t>, </a:t>
+            </a:r>
+            <a:r>
+              <a:rPr kumimoji="0" lang="es-CO" altLang="es-CO" sz="2000" b="0" i="0" u="none" strike="noStrike" cap="none" normalizeH="0" baseline="0" dirty="0" err="1">
+                <a:ln>
+                  <a:noFill/>
+                </a:ln>
+                <a:solidFill>
+                  <a:schemeClr val="tx1"/>
+                </a:solidFill>
+                <a:effectLst/>
+                <a:latin typeface="Arial" panose="020B0604020202020204" pitchFamily="34" charset="0"/>
+                <a:cs typeface="Arial" panose="020B0604020202020204" pitchFamily="34" charset="0"/>
+              </a:rPr>
+              <a:t>vy</a:t>
+            </a:r>
+            <a:r>
+              <a:rPr kumimoji="0" lang="es-CO" altLang="es-CO" sz="2000" b="0" i="0" u="none" strike="noStrike" cap="none" normalizeH="0" baseline="0" dirty="0">
+                <a:ln>
+                  <a:noFill/>
+                </a:ln>
+                <a:solidFill>
+                  <a:schemeClr val="tx1"/>
+                </a:solidFill>
+                <a:effectLst/>
+                <a:latin typeface="Arial" panose="020B0604020202020204" pitchFamily="34" charset="0"/>
+                <a:cs typeface="Arial" panose="020B0604020202020204" pitchFamily="34" charset="0"/>
+              </a:rPr>
+              <a:t>, </a:t>
+            </a:r>
+            <a:r>
+              <a:rPr kumimoji="0" lang="es-CO" altLang="es-CO" sz="2000" b="0" i="0" u="none" strike="noStrike" cap="none" normalizeH="0" baseline="0" dirty="0" err="1">
+                <a:ln>
+                  <a:noFill/>
+                </a:ln>
+                <a:solidFill>
+                  <a:schemeClr val="tx1"/>
+                </a:solidFill>
+                <a:effectLst/>
+                <a:latin typeface="Arial" panose="020B0604020202020204" pitchFamily="34" charset="0"/>
+                <a:cs typeface="Arial" panose="020B0604020202020204" pitchFamily="34" charset="0"/>
+              </a:rPr>
+              <a:t>vz</a:t>
+            </a:r>
+            <a:r>
+              <a:rPr kumimoji="0" lang="es-CO" altLang="es-CO" sz="2000" b="0" i="0" u="none" strike="noStrike" cap="none" normalizeH="0" baseline="0" dirty="0">
+                <a:ln>
+                  <a:noFill/>
+                </a:ln>
+                <a:solidFill>
+                  <a:schemeClr val="tx1"/>
+                </a:solidFill>
+                <a:effectLst/>
+                <a:latin typeface="Arial" panose="020B0604020202020204" pitchFamily="34" charset="0"/>
+                <a:cs typeface="Arial" panose="020B0604020202020204" pitchFamily="34" charset="0"/>
+              </a:rPr>
+              <a:t>)</a:t>
+            </a:r>
+          </a:p>
+          <a:p>
+            <a:pPr marL="0" marR="0" lvl="0" indent="0" algn="l" defTabSz="914400" rtl="0" eaLnBrk="0" fontAlgn="base" latinLnBrk="0" hangingPunct="0">
+              <a:lnSpc>
+                <a:spcPct val="100000"/>
+              </a:lnSpc>
+              <a:spcBef>
+                <a:spcPct val="0"/>
+              </a:spcBef>
+              <a:spcAft>
+                <a:spcPct val="0"/>
+              </a:spcAft>
+              <a:buClrTx/>
+              <a:buSzTx/>
+              <a:buFontTx/>
+              <a:buChar char="•"/>
+              <a:tabLst/>
+            </a:pPr>
+            <a:r>
+              <a:rPr kumimoji="0" lang="es-CO" altLang="es-CO" sz="2000" b="0" i="0" u="none" strike="noStrike" cap="none" normalizeH="0" baseline="0" dirty="0">
+                <a:ln>
+                  <a:noFill/>
+                </a:ln>
+                <a:solidFill>
+                  <a:schemeClr val="tx1"/>
+                </a:solidFill>
+                <a:effectLst/>
+                <a:latin typeface="Arial" panose="020B0604020202020204" pitchFamily="34" charset="0"/>
+                <a:cs typeface="Arial" panose="020B0604020202020204" pitchFamily="34" charset="0"/>
+              </a:rPr>
+              <a:t>B: vector campo magnético (</a:t>
+            </a:r>
+            <a:r>
+              <a:rPr kumimoji="0" lang="es-CO" altLang="es-CO" sz="2000" b="0" i="0" u="none" strike="noStrike" cap="none" normalizeH="0" baseline="0" dirty="0" err="1">
+                <a:ln>
+                  <a:noFill/>
+                </a:ln>
+                <a:solidFill>
+                  <a:schemeClr val="tx1"/>
+                </a:solidFill>
+                <a:effectLst/>
+                <a:latin typeface="Arial" panose="020B0604020202020204" pitchFamily="34" charset="0"/>
+                <a:cs typeface="Arial" panose="020B0604020202020204" pitchFamily="34" charset="0"/>
+              </a:rPr>
+              <a:t>Bx</a:t>
+            </a:r>
+            <a:r>
+              <a:rPr kumimoji="0" lang="es-CO" altLang="es-CO" sz="2000" b="0" i="0" u="none" strike="noStrike" cap="none" normalizeH="0" baseline="0" dirty="0">
+                <a:ln>
+                  <a:noFill/>
+                </a:ln>
+                <a:solidFill>
+                  <a:schemeClr val="tx1"/>
+                </a:solidFill>
+                <a:effectLst/>
+                <a:latin typeface="Arial" panose="020B0604020202020204" pitchFamily="34" charset="0"/>
+                <a:cs typeface="Arial" panose="020B0604020202020204" pitchFamily="34" charset="0"/>
+              </a:rPr>
+              <a:t>, </a:t>
+            </a:r>
+            <a:r>
+              <a:rPr kumimoji="0" lang="es-CO" altLang="es-CO" sz="2000" b="0" i="0" u="none" strike="noStrike" cap="none" normalizeH="0" baseline="0" dirty="0" err="1">
+                <a:ln>
+                  <a:noFill/>
+                </a:ln>
+                <a:solidFill>
+                  <a:schemeClr val="tx1"/>
+                </a:solidFill>
+                <a:effectLst/>
+                <a:latin typeface="Arial" panose="020B0604020202020204" pitchFamily="34" charset="0"/>
+                <a:cs typeface="Arial" panose="020B0604020202020204" pitchFamily="34" charset="0"/>
+              </a:rPr>
+              <a:t>By</a:t>
+            </a:r>
+            <a:r>
+              <a:rPr kumimoji="0" lang="es-CO" altLang="es-CO" sz="2000" b="0" i="0" u="none" strike="noStrike" cap="none" normalizeH="0" baseline="0" dirty="0">
+                <a:ln>
+                  <a:noFill/>
+                </a:ln>
+                <a:solidFill>
+                  <a:schemeClr val="tx1"/>
+                </a:solidFill>
+                <a:effectLst/>
+                <a:latin typeface="Arial" panose="020B0604020202020204" pitchFamily="34" charset="0"/>
+                <a:cs typeface="Arial" panose="020B0604020202020204" pitchFamily="34" charset="0"/>
+              </a:rPr>
+              <a:t>, </a:t>
+            </a:r>
+            <a:r>
+              <a:rPr kumimoji="0" lang="es-CO" altLang="es-CO" sz="2000" b="0" i="0" u="none" strike="noStrike" cap="none" normalizeH="0" baseline="0" dirty="0" err="1">
+                <a:ln>
+                  <a:noFill/>
+                </a:ln>
+                <a:solidFill>
+                  <a:schemeClr val="tx1"/>
+                </a:solidFill>
+                <a:effectLst/>
+                <a:latin typeface="Arial" panose="020B0604020202020204" pitchFamily="34" charset="0"/>
+                <a:cs typeface="Arial" panose="020B0604020202020204" pitchFamily="34" charset="0"/>
+              </a:rPr>
+              <a:t>Bz</a:t>
+            </a:r>
+            <a:r>
+              <a:rPr kumimoji="0" lang="es-CO" altLang="es-CO" sz="2000" b="0" i="0" u="none" strike="noStrike" cap="none" normalizeH="0" baseline="0" dirty="0">
+                <a:ln>
+                  <a:noFill/>
+                </a:ln>
+                <a:solidFill>
+                  <a:schemeClr val="tx1"/>
+                </a:solidFill>
+                <a:effectLst/>
+                <a:latin typeface="Arial" panose="020B0604020202020204" pitchFamily="34" charset="0"/>
+                <a:cs typeface="Arial" panose="020B0604020202020204" pitchFamily="34" charset="0"/>
+              </a:rPr>
+              <a:t>)</a:t>
+            </a:r>
+          </a:p>
+          <a:p>
+            <a:pPr marL="0" marR="0" lvl="0" indent="0" algn="l" defTabSz="914400" rtl="0" eaLnBrk="0" fontAlgn="base" latinLnBrk="0" hangingPunct="0">
+              <a:lnSpc>
+                <a:spcPct val="100000"/>
+              </a:lnSpc>
+              <a:spcBef>
+                <a:spcPct val="0"/>
+              </a:spcBef>
+              <a:spcAft>
+                <a:spcPct val="0"/>
+              </a:spcAft>
+              <a:buClrTx/>
+              <a:buSzTx/>
+              <a:buFontTx/>
+              <a:buNone/>
+              <a:tabLst/>
+            </a:pPr>
+            <a:endParaRPr kumimoji="0" lang="es-CO" altLang="es-CO" b="0" i="0" u="none" strike="noStrike" cap="none" normalizeH="0" baseline="0" dirty="0">
+              <a:ln>
+                <a:noFill/>
+              </a:ln>
+              <a:solidFill>
+                <a:schemeClr val="tx1"/>
+              </a:solidFill>
+              <a:effectLst/>
+              <a:latin typeface="Arial" panose="020B0604020202020204" pitchFamily="34" charset="0"/>
+            </a:endParaRPr>
+          </a:p>
+        </p:txBody>
+      </p:sp>
+    </p:spTree>
+    <p:extLst>
+      <p:ext uri="{BB962C8B-B14F-4D97-AF65-F5344CB8AC3E}">
+        <p14:creationId xmlns:p14="http://schemas.microsoft.com/office/powerpoint/2010/main" val="4202159285"/>
+      </p:ext>
+    </p:extLst>
+  </p:cSld>
+  <p:clrMapOvr>
+    <a:masterClrMapping/>
+  </p:clrMapOvr>
+</p:sld>
+</file>
+
+<file path=ppt/slides/slide6.xml><?xml version="1.0" encoding="utf-8"?>
+<p:sld xmlns:a="http://schemas.openxmlformats.org/drawingml/2006/main" xmlns:r="http://schemas.openxmlformats.org/officeDocument/2006/relationships" xmlns:p="http://schemas.openxmlformats.org/presentationml/2006/main">
+  <p:cSld>
+    <p:spTree>
+      <p:nvGrpSpPr>
+        <p:cNvPr id="1" name=""/>
+        <p:cNvGrpSpPr/>
+        <p:nvPr/>
+      </p:nvGrpSpPr>
+      <p:grpSpPr>
+        <a:xfrm>
+          <a:off x="0" y="0"/>
+          <a:ext cx="0" cy="0"/>
+          <a:chOff x="0" y="0"/>
+          <a:chExt cx="0" cy="0"/>
+        </a:xfrm>
+      </p:grpSpPr>
+      <p:sp>
+        <p:nvSpPr>
+          <p:cNvPr id="2" name="Título 1">
+            <a:extLst>
+              <a:ext uri="{FF2B5EF4-FFF2-40B4-BE49-F238E27FC236}">
+                <a16:creationId xmlns:a16="http://schemas.microsoft.com/office/drawing/2014/main" id="{7F4B1939-05EE-4293-A6B7-8DCB0A00C7DE}"/>
+              </a:ext>
+            </a:extLst>
+          </p:cNvPr>
+          <p:cNvSpPr>
+            <a:spLocks noGrp="1"/>
+          </p:cNvSpPr>
+          <p:nvPr>
+            <p:ph type="title"/>
+          </p:nvPr>
+        </p:nvSpPr>
+        <p:spPr/>
+        <p:txBody>
+          <a:bodyPr>
+            <a:normAutofit/>
+          </a:bodyPr>
+          <a:lstStyle/>
+          <a:p>
+            <a:r>
+              <a:rPr lang="es-ES" sz="4000" dirty="0">
+                <a:latin typeface="Arial" panose="020B0604020202020204" pitchFamily="34" charset="0"/>
+                <a:cs typeface="Arial" panose="020B0604020202020204" pitchFamily="34" charset="0"/>
+              </a:rPr>
+              <a:t>Métodos de Dicha Clase</a:t>
+            </a:r>
+            <a:endParaRPr lang="es-CO" sz="4000" dirty="0">
+              <a:latin typeface="Arial" panose="020B0604020202020204" pitchFamily="34" charset="0"/>
+              <a:cs typeface="Arial" panose="020B0604020202020204" pitchFamily="34" charset="0"/>
+            </a:endParaRPr>
+          </a:p>
+        </p:txBody>
+      </p:sp>
+      <p:sp>
+        <p:nvSpPr>
+          <p:cNvPr id="5" name="CuadroTexto 4">
+            <a:extLst>
+              <a:ext uri="{FF2B5EF4-FFF2-40B4-BE49-F238E27FC236}">
+                <a16:creationId xmlns:a16="http://schemas.microsoft.com/office/drawing/2014/main" id="{439AF61C-D176-4E88-87A8-012290B00B2E}"/>
+              </a:ext>
+            </a:extLst>
+          </p:cNvPr>
+          <p:cNvSpPr txBox="1"/>
+          <p:nvPr/>
+        </p:nvSpPr>
+        <p:spPr>
+          <a:xfrm>
+            <a:off x="2413780" y="1707321"/>
+            <a:ext cx="6392595" cy="1938992"/>
+          </a:xfrm>
+          <a:prstGeom prst="rect">
+            <a:avLst/>
+          </a:prstGeom>
+          <a:noFill/>
+        </p:spPr>
+        <p:txBody>
+          <a:bodyPr wrap="square">
+            <a:spAutoFit/>
+          </a:bodyPr>
+          <a:lstStyle/>
+          <a:p>
+            <a:pPr marL="571500" indent="-571500">
+              <a:buFont typeface="Wingdings" panose="05000000000000000000" pitchFamily="2" charset="2"/>
+              <a:buChar char="Ø"/>
+            </a:pPr>
+            <a:r>
+              <a:rPr lang="es-CO" sz="4000" dirty="0" err="1"/>
+              <a:t>frecuencia_ciclotron</a:t>
+            </a:r>
+            <a:r>
+              <a:rPr lang="es-CO" sz="4000" dirty="0"/>
+              <a:t>()</a:t>
+            </a:r>
+          </a:p>
+          <a:p>
+            <a:pPr marL="571500" indent="-571500">
+              <a:buFont typeface="Wingdings" panose="05000000000000000000" pitchFamily="2" charset="2"/>
+              <a:buChar char="Ø"/>
+            </a:pPr>
+            <a:r>
+              <a:rPr lang="es-CO" sz="4000" dirty="0" err="1"/>
+              <a:t>radio_orbita</a:t>
+            </a:r>
+            <a:r>
+              <a:rPr lang="es-CO" sz="4000" dirty="0"/>
+              <a:t>()</a:t>
+            </a:r>
+          </a:p>
+          <a:p>
+            <a:pPr marL="571500" indent="-571500">
+              <a:buFont typeface="Wingdings" panose="05000000000000000000" pitchFamily="2" charset="2"/>
+              <a:buChar char="Ø"/>
+            </a:pPr>
+            <a:r>
+              <a:rPr lang="es-CO" sz="4000" dirty="0" err="1"/>
+              <a:t>energia_cinetica</a:t>
+            </a:r>
+            <a:r>
+              <a:rPr lang="es-CO" sz="4000" dirty="0"/>
+              <a:t>()</a:t>
+            </a:r>
+          </a:p>
+        </p:txBody>
+      </p:sp>
+    </p:spTree>
+    <p:extLst>
+      <p:ext uri="{BB962C8B-B14F-4D97-AF65-F5344CB8AC3E}">
+        <p14:creationId xmlns:p14="http://schemas.microsoft.com/office/powerpoint/2010/main" val="2333823414"/>
+      </p:ext>
+    </p:extLst>
+  </p:cSld>
+  <p:clrMapOvr>
+    <a:masterClrMapping/>
+  </p:clrMapOvr>
+</p:sld>
+</file>
+
+<file path=ppt/slides/slide7.xml><?xml version="1.0" encoding="utf-8"?>
+<p:sld xmlns:a="http://schemas.openxmlformats.org/drawingml/2006/main" xmlns:r="http://schemas.openxmlformats.org/officeDocument/2006/relationships" xmlns:p="http://schemas.openxmlformats.org/presentationml/2006/main">
+  <p:cSld>
+    <p:spTree>
+      <p:nvGrpSpPr>
+        <p:cNvPr id="1" name=""/>
+        <p:cNvGrpSpPr/>
+        <p:nvPr/>
+      </p:nvGrpSpPr>
+      <p:grpSpPr>
+        <a:xfrm>
+          <a:off x="0" y="0"/>
+          <a:ext cx="0" cy="0"/>
+          <a:chOff x="0" y="0"/>
+          <a:chExt cx="0" cy="0"/>
+        </a:xfrm>
+      </p:grpSpPr>
+      <p:sp>
+        <p:nvSpPr>
+          <p:cNvPr id="4" name="Rectangle 1">
+            <a:extLst>
+              <a:ext uri="{FF2B5EF4-FFF2-40B4-BE49-F238E27FC236}">
+                <a16:creationId xmlns:a16="http://schemas.microsoft.com/office/drawing/2014/main" id="{DF7ED52F-6CCF-4038-8C32-F64E2FDE8633}"/>
+              </a:ext>
+            </a:extLst>
+          </p:cNvPr>
+          <p:cNvSpPr>
+            <a:spLocks noChangeArrowheads="1"/>
+          </p:cNvSpPr>
+          <p:nvPr/>
+        </p:nvSpPr>
+        <p:spPr bwMode="auto">
+          <a:xfrm>
+            <a:off x="321212" y="375591"/>
+            <a:ext cx="11549575" cy="3785652"/>
+          </a:xfrm>
+          <a:prstGeom prst="rect">
+            <a:avLst/>
+          </a:prstGeom>
+          <a:noFill/>
+          <a:ln>
+            <a:noFill/>
+          </a:ln>
+          <a:effectLst/>
+          <a:extLst>
+            <a:ext uri="{909E8E84-426E-40DD-AFC4-6F175D3DCCD1}">
+              <a14:hiddenFill xmlns:a14="http://schemas.microsoft.com/office/drawing/2010/main">
+                <a:solidFill>
+                  <a:schemeClr val="accent1"/>
+                </a:solidFill>
+              </a14:hiddenFill>
+            </a:ext>
+            <a:ext uri="{91240B29-F687-4F45-9708-019B960494DF}">
+              <a14:hiddenLine xmlns:a14="http://schemas.microsoft.com/office/drawing/2010/main" w="9525">
+                <a:solidFill>
+                  <a:schemeClr val="tx1"/>
+                </a:solidFill>
+                <a:miter lim="800000"/>
+                <a:headEnd/>
+                <a:tailEnd/>
+              </a14:hiddenLine>
+            </a:ext>
+            <a:ext uri="{AF507438-7753-43E0-B8FC-AC1667EBCBE1}">
+              <a14:hiddenEffects xmlns:a14="http://schemas.microsoft.com/office/drawing/2010/main">
+                <a:effectLst>
+                  <a:outerShdw dist="35921" dir="2700000" algn="ctr" rotWithShape="0">
+                    <a:schemeClr val="bg2"/>
+                  </a:outerShdw>
+                </a:effectLst>
+              </a14:hiddenEffects>
+            </a:ext>
+          </a:extLst>
+        </p:spPr>
+        <p:txBody>
+          <a:bodyPr vert="horz" wrap="square" lIns="91440" tIns="45720" rIns="91440" bIns="45720" numCol="1" anchor="ctr" anchorCtr="0" compatLnSpc="1">
+            <a:prstTxWarp prst="textNoShape">
+              <a:avLst/>
+            </a:prstTxWarp>
+            <a:spAutoFit/>
+          </a:bodyPr>
+          <a:lstStyle/>
+          <a:p>
+            <a:pPr marL="0" marR="0" lvl="0" indent="0" algn="l" defTabSz="914400" rtl="0" eaLnBrk="0" fontAlgn="base" latinLnBrk="0" hangingPunct="0">
+              <a:lnSpc>
+                <a:spcPct val="100000"/>
+              </a:lnSpc>
+              <a:spcBef>
+                <a:spcPct val="0"/>
+              </a:spcBef>
+              <a:spcAft>
+                <a:spcPct val="0"/>
+              </a:spcAft>
+              <a:buClrTx/>
+              <a:buSzTx/>
+              <a:buFontTx/>
+              <a:buNone/>
+              <a:tabLst/>
+            </a:pPr>
+            <a:r>
+              <a:rPr kumimoji="0" lang="es-CO" altLang="es-CO" sz="4000" b="1" i="0" u="none" strike="noStrike" cap="none" normalizeH="0" baseline="0" dirty="0">
+                <a:ln>
+                  <a:noFill/>
+                </a:ln>
+                <a:solidFill>
+                  <a:schemeClr val="tx1"/>
+                </a:solidFill>
+                <a:effectLst/>
+                <a:cs typeface="Arial" panose="020B0604020202020204" pitchFamily="34" charset="0"/>
+              </a:rPr>
+              <a:t>Archivo simulacion.py</a:t>
+            </a:r>
+          </a:p>
+          <a:p>
+            <a:pPr marL="0" marR="0" lvl="0" indent="0" algn="l" defTabSz="914400" rtl="0" eaLnBrk="0" fontAlgn="base" latinLnBrk="0" hangingPunct="0">
+              <a:lnSpc>
+                <a:spcPct val="100000"/>
+              </a:lnSpc>
+              <a:spcBef>
+                <a:spcPct val="0"/>
+              </a:spcBef>
+              <a:spcAft>
+                <a:spcPct val="0"/>
+              </a:spcAft>
+              <a:buClrTx/>
+              <a:buSzTx/>
+              <a:buFontTx/>
+              <a:buNone/>
+              <a:tabLst/>
+            </a:pPr>
+            <a:endParaRPr kumimoji="0" lang="es-CO" altLang="es-CO" sz="4000" b="1" i="0" u="none" strike="noStrike" cap="none" normalizeH="0" baseline="0" dirty="0">
+              <a:ln>
+                <a:noFill/>
+              </a:ln>
+              <a:solidFill>
+                <a:schemeClr val="tx1"/>
+              </a:solidFill>
+              <a:effectLst/>
+              <a:cs typeface="Arial" panose="020B0604020202020204" pitchFamily="34" charset="0"/>
+            </a:endParaRPr>
+          </a:p>
+          <a:p>
+            <a:pPr marL="0" marR="0" lvl="0" indent="0" algn="l" defTabSz="914400" rtl="0" eaLnBrk="0" fontAlgn="base" latinLnBrk="0" hangingPunct="0">
+              <a:lnSpc>
+                <a:spcPct val="100000"/>
+              </a:lnSpc>
+              <a:spcBef>
+                <a:spcPct val="0"/>
+              </a:spcBef>
+              <a:spcAft>
+                <a:spcPct val="0"/>
+              </a:spcAft>
+              <a:buClrTx/>
+              <a:buSzTx/>
+              <a:buFontTx/>
+              <a:buNone/>
+              <a:tabLst/>
+            </a:pPr>
+            <a:r>
+              <a:rPr kumimoji="0" lang="es-CO" altLang="es-CO" sz="4000" b="1" i="0" u="none" strike="noStrike" cap="none" normalizeH="0" baseline="0" dirty="0">
+                <a:ln>
+                  <a:noFill/>
+                </a:ln>
+                <a:solidFill>
+                  <a:schemeClr val="tx1"/>
+                </a:solidFill>
+                <a:effectLst/>
+                <a:cs typeface="Arial" panose="020B0604020202020204" pitchFamily="34" charset="0"/>
+              </a:rPr>
+              <a:t>Propósito: </a:t>
+            </a:r>
+            <a:r>
+              <a:rPr kumimoji="0" lang="es-CO" altLang="es-CO" sz="4000" i="0" u="none" strike="noStrike" cap="none" normalizeH="0" baseline="0" dirty="0">
+                <a:ln>
+                  <a:noFill/>
+                </a:ln>
+                <a:solidFill>
+                  <a:schemeClr val="tx1"/>
+                </a:solidFill>
+                <a:effectLst/>
+                <a:cs typeface="Arial" panose="020B0604020202020204" pitchFamily="34" charset="0"/>
+              </a:rPr>
+              <a:t>Contiene las funciones numéricas que simulan el movimiento real de la partícula bajo la fuerza de Lorentz, usando un método de integración temporal (</a:t>
+            </a:r>
+            <a:r>
+              <a:rPr kumimoji="0" lang="es-CO" altLang="es-CO" sz="4000" i="1" u="none" strike="noStrike" cap="none" normalizeH="0" baseline="0" dirty="0">
+                <a:ln>
+                  <a:noFill/>
+                </a:ln>
+                <a:solidFill>
+                  <a:schemeClr val="tx1"/>
+                </a:solidFill>
+                <a:effectLst/>
+                <a:cs typeface="Arial" panose="020B0604020202020204" pitchFamily="34" charset="0"/>
+              </a:rPr>
+              <a:t>Euler explícito</a:t>
+            </a:r>
+            <a:r>
+              <a:rPr kumimoji="0" lang="es-CO" altLang="es-CO" sz="4000" i="0" u="none" strike="noStrike" cap="none" normalizeH="0" baseline="0" dirty="0">
+                <a:ln>
+                  <a:noFill/>
+                </a:ln>
+                <a:solidFill>
+                  <a:schemeClr val="tx1"/>
+                </a:solidFill>
+                <a:effectLst/>
+                <a:cs typeface="Arial" panose="020B0604020202020204" pitchFamily="34" charset="0"/>
+              </a:rPr>
+              <a:t>).</a:t>
+            </a:r>
+          </a:p>
+        </p:txBody>
+      </p:sp>
+      <p:sp>
+        <p:nvSpPr>
+          <p:cNvPr id="6" name="CuadroTexto 5">
+            <a:extLst>
+              <a:ext uri="{FF2B5EF4-FFF2-40B4-BE49-F238E27FC236}">
+                <a16:creationId xmlns:a16="http://schemas.microsoft.com/office/drawing/2014/main" id="{295A9748-61E8-4ACD-B3AA-FC136B1D3445}"/>
+              </a:ext>
+            </a:extLst>
+          </p:cNvPr>
+          <p:cNvSpPr txBox="1"/>
+          <p:nvPr/>
+        </p:nvSpPr>
+        <p:spPr>
+          <a:xfrm>
+            <a:off x="2141219" y="4581829"/>
+            <a:ext cx="7909560" cy="1323439"/>
+          </a:xfrm>
+          <a:prstGeom prst="rect">
+            <a:avLst/>
+          </a:prstGeom>
+          <a:noFill/>
+        </p:spPr>
+        <p:txBody>
+          <a:bodyPr wrap="square">
+            <a:spAutoFit/>
+          </a:bodyPr>
+          <a:lstStyle/>
+          <a:p>
+            <a:pPr marL="571500" indent="-571500">
+              <a:buFont typeface="Wingdings" panose="05000000000000000000" pitchFamily="2" charset="2"/>
+              <a:buChar char="Ø"/>
+            </a:pPr>
+            <a:r>
+              <a:rPr lang="fr-FR" sz="4000" dirty="0" err="1"/>
+              <a:t>lorentz_force</a:t>
+            </a:r>
+            <a:r>
+              <a:rPr lang="fr-FR" sz="4000" dirty="0"/>
+              <a:t>(q, v, B)</a:t>
+            </a:r>
+          </a:p>
+          <a:p>
+            <a:pPr marL="571500" indent="-571500">
+              <a:buFont typeface="Wingdings" panose="05000000000000000000" pitchFamily="2" charset="2"/>
+              <a:buChar char="Ø"/>
+            </a:pPr>
+            <a:r>
+              <a:rPr lang="es-CO" sz="4000" dirty="0"/>
+              <a:t>simular(</a:t>
+            </a:r>
+            <a:r>
+              <a:rPr lang="es-CO" sz="4000" dirty="0" err="1"/>
+              <a:t>particula</a:t>
+            </a:r>
+            <a:r>
+              <a:rPr lang="es-CO" sz="4000" dirty="0"/>
+              <a:t>, </a:t>
+            </a:r>
+            <a:r>
+              <a:rPr lang="es-CO" sz="4000" dirty="0" err="1"/>
+              <a:t>dt</a:t>
+            </a:r>
+            <a:r>
+              <a:rPr lang="es-CO" sz="4000" dirty="0"/>
+              <a:t>, pasos)</a:t>
+            </a:r>
+          </a:p>
+        </p:txBody>
+      </p:sp>
+    </p:spTree>
+    <p:extLst>
+      <p:ext uri="{BB962C8B-B14F-4D97-AF65-F5344CB8AC3E}">
+        <p14:creationId xmlns:p14="http://schemas.microsoft.com/office/powerpoint/2010/main" val="1603377453"/>
+      </p:ext>
+    </p:extLst>
+  </p:cSld>
+  <p:clrMapOvr>
+    <a:masterClrMapping/>
+  </p:clrMapOvr>
+</p:sld>
+</file>
+
+<file path=ppt/slides/slide8.xml><?xml version="1.0" encoding="utf-8"?>
+<p:sld xmlns:a="http://schemas.openxmlformats.org/drawingml/2006/main" xmlns:r="http://schemas.openxmlformats.org/officeDocument/2006/relationships" xmlns:p="http://schemas.openxmlformats.org/presentationml/2006/main">
+  <p:cSld>
+    <p:spTree>
+      <p:nvGrpSpPr>
+        <p:cNvPr id="1" name=""/>
+        <p:cNvGrpSpPr/>
+        <p:nvPr/>
+      </p:nvGrpSpPr>
+      <p:grpSpPr>
+        <a:xfrm>
+          <a:off x="0" y="0"/>
+          <a:ext cx="0" cy="0"/>
+          <a:chOff x="0" y="0"/>
+          <a:chExt cx="0" cy="0"/>
+        </a:xfrm>
+      </p:grpSpPr>
+      <p:sp>
+        <p:nvSpPr>
+          <p:cNvPr id="2" name="Título 1">
+            <a:extLst>
+              <a:ext uri="{FF2B5EF4-FFF2-40B4-BE49-F238E27FC236}">
+                <a16:creationId xmlns:a16="http://schemas.microsoft.com/office/drawing/2014/main" id="{C190D16A-8925-4B2E-ADE0-5C45372F1230}"/>
+              </a:ext>
+            </a:extLst>
+          </p:cNvPr>
+          <p:cNvSpPr>
+            <a:spLocks noGrp="1"/>
+          </p:cNvSpPr>
+          <p:nvPr>
+            <p:ph type="title"/>
+          </p:nvPr>
+        </p:nvSpPr>
+        <p:spPr>
+          <a:xfrm>
+            <a:off x="838200" y="0"/>
+            <a:ext cx="10515600" cy="1325563"/>
+          </a:xfrm>
+        </p:spPr>
+        <p:txBody>
+          <a:bodyPr/>
+          <a:lstStyle/>
+          <a:p>
+            <a:r>
+              <a:rPr lang="es-ES" dirty="0"/>
+              <a:t>EJERCICIO:</a:t>
+            </a:r>
+            <a:endParaRPr lang="es-CO" dirty="0"/>
+          </a:p>
+        </p:txBody>
+      </p:sp>
+      <p:sp>
+        <p:nvSpPr>
+          <p:cNvPr id="3" name="Marcador de contenido 2">
+            <a:extLst>
+              <a:ext uri="{FF2B5EF4-FFF2-40B4-BE49-F238E27FC236}">
+                <a16:creationId xmlns:a16="http://schemas.microsoft.com/office/drawing/2014/main" id="{419DAB50-9BAB-41F6-BA07-7C4EB97A33A1}"/>
+              </a:ext>
+            </a:extLst>
+          </p:cNvPr>
+          <p:cNvSpPr>
+            <a:spLocks noGrp="1"/>
+          </p:cNvSpPr>
+          <p:nvPr>
+            <p:ph idx="1"/>
+          </p:nvPr>
+        </p:nvSpPr>
+        <p:spPr>
+          <a:xfrm>
+            <a:off x="711590" y="1015440"/>
+            <a:ext cx="4097219" cy="2656228"/>
+          </a:xfrm>
+        </p:spPr>
+        <p:txBody>
+          <a:bodyPr>
+            <a:noAutofit/>
+          </a:bodyPr>
+          <a:lstStyle/>
+          <a:p>
+            <a:pPr marL="0" indent="0" algn="just">
+              <a:buNone/>
+            </a:pPr>
+            <a:r>
+              <a:rPr lang="es-ES" dirty="0"/>
+              <a:t>Un investigador quiere estudiar el comportamiento de un gas confinado en una caja cuadrada. Para ello, decide modelar las trayectorias de las partículas y verificar si la energía total se conserva y si la velocidad promedio puede relacionarse con la temperatura.</a:t>
+            </a:r>
+          </a:p>
+          <a:p>
+            <a:pPr marL="0" indent="0" algn="just">
+              <a:buNone/>
+            </a:pPr>
+            <a:endParaRPr lang="es-ES" dirty="0"/>
+          </a:p>
+          <a:p>
+            <a:endParaRPr lang="es-CO" sz="200" dirty="0"/>
+          </a:p>
+        </p:txBody>
+      </p:sp>
+      <p:sp>
+        <p:nvSpPr>
+          <p:cNvPr id="5" name="CuadroTexto 4">
+            <a:extLst>
+              <a:ext uri="{FF2B5EF4-FFF2-40B4-BE49-F238E27FC236}">
+                <a16:creationId xmlns:a16="http://schemas.microsoft.com/office/drawing/2014/main" id="{3E7ECE4A-438A-4405-BDC7-45B53C9E21DC}"/>
+              </a:ext>
+            </a:extLst>
+          </p:cNvPr>
+          <p:cNvSpPr txBox="1"/>
+          <p:nvPr/>
+        </p:nvSpPr>
+        <p:spPr>
+          <a:xfrm>
+            <a:off x="5289452" y="1122330"/>
+            <a:ext cx="6544991" cy="1938992"/>
+          </a:xfrm>
+          <a:prstGeom prst="rect">
+            <a:avLst/>
+          </a:prstGeom>
+          <a:noFill/>
+        </p:spPr>
+        <p:txBody>
+          <a:bodyPr wrap="square">
+            <a:spAutoFit/>
+          </a:bodyPr>
+          <a:lstStyle/>
+          <a:p>
+            <a:r>
+              <a:rPr lang="es-CO" sz="2000" dirty="0" err="1"/>
+              <a:t>gas_ideal</a:t>
+            </a:r>
+            <a:r>
+              <a:rPr lang="es-CO" sz="2000" dirty="0"/>
+              <a:t>/</a:t>
+            </a:r>
+          </a:p>
+          <a:p>
+            <a:r>
+              <a:rPr lang="es-CO" sz="2000" dirty="0"/>
+              <a:t>│</a:t>
+            </a:r>
+          </a:p>
+          <a:p>
+            <a:r>
+              <a:rPr lang="es-CO" sz="2000" dirty="0"/>
+              <a:t>├── particula.py        # clase Partícula</a:t>
+            </a:r>
+          </a:p>
+          <a:p>
+            <a:r>
+              <a:rPr lang="es-CO" sz="2000" dirty="0"/>
+              <a:t>├── simulacion.py       # funciones de simulación y análisis</a:t>
+            </a:r>
+          </a:p>
+          <a:p>
+            <a:r>
+              <a:rPr lang="es-CO" sz="2000" dirty="0"/>
+              <a:t>├── test_gas.py         # pruebas unitarias</a:t>
+            </a:r>
+          </a:p>
+          <a:p>
+            <a:r>
+              <a:rPr lang="es-CO" sz="2000" dirty="0"/>
+              <a:t>└── graficar.py         # visualización de resultados</a:t>
+            </a:r>
+          </a:p>
+        </p:txBody>
+      </p:sp>
+      <p:sp>
+        <p:nvSpPr>
+          <p:cNvPr id="7" name="CuadroTexto 6">
+            <a:extLst>
+              <a:ext uri="{FF2B5EF4-FFF2-40B4-BE49-F238E27FC236}">
+                <a16:creationId xmlns:a16="http://schemas.microsoft.com/office/drawing/2014/main" id="{01706E1C-4D01-469E-8991-5FB68A7A1721}"/>
+              </a:ext>
+            </a:extLst>
+          </p:cNvPr>
+          <p:cNvSpPr txBox="1"/>
+          <p:nvPr/>
+        </p:nvSpPr>
+        <p:spPr>
+          <a:xfrm>
+            <a:off x="5525087" y="3528122"/>
+            <a:ext cx="5686864" cy="2554545"/>
+          </a:xfrm>
+          <a:prstGeom prst="rect">
+            <a:avLst/>
+          </a:prstGeom>
+          <a:noFill/>
+        </p:spPr>
+        <p:txBody>
+          <a:bodyPr wrap="square">
+            <a:spAutoFit/>
+          </a:bodyPr>
+          <a:lstStyle/>
+          <a:p>
+            <a:pPr marL="0" indent="0" algn="just">
+              <a:buNone/>
+            </a:pPr>
+            <a:r>
+              <a:rPr lang="es-ES" sz="3200" dirty="0"/>
+              <a:t>Tú eres parte del equipo de simulación. Tu tarea consiste en diseñar el modelo computacional, probar su validez física y analizar los resultados.</a:t>
+            </a:r>
+          </a:p>
+        </p:txBody>
+      </p:sp>
+    </p:spTree>
+    <p:extLst>
+      <p:ext uri="{BB962C8B-B14F-4D97-AF65-F5344CB8AC3E}">
+        <p14:creationId xmlns:p14="http://schemas.microsoft.com/office/powerpoint/2010/main" val="223405666"/>
+      </p:ext>
+    </p:extLst>
+  </p:cSld>
+  <p:clrMapOvr>
+    <a:masterClrMapping/>
+  </p:clrMapOvr>
+</p:sld>
+</file>
+
 <file path=ppt/theme/theme1.xml><?xml version="1.0" encoding="utf-8"?>
 <a:theme xmlns:a="http://schemas.openxmlformats.org/drawingml/2006/main" name="Office Theme">
   <a:themeElements>
